--- a/AgenticAI/5-Tools-and-Framework-RAG/crewAI/1_crewAI_Overview.pptx
+++ b/AgenticAI/5-Tools-and-Framework-RAG/crewAI/1_crewAI_Overview.pptx
@@ -5006,7 +5006,7 @@
         </p:nvSpPr>
         <p:spPr>
           <a:xfrm>
-            <a:off x="586596" y="577107"/>
+            <a:off x="646981" y="85401"/>
             <a:ext cx="10332720" cy="639218"/>
           </a:xfrm>
           <a:prstGeom prst="rect">
@@ -5051,8 +5051,8 @@
         </p:nvSpPr>
         <p:spPr>
           <a:xfrm>
-            <a:off x="465826" y="1733909"/>
-            <a:ext cx="11333167" cy="1631216"/>
+            <a:off x="353683" y="785003"/>
+            <a:ext cx="11333167" cy="1323439"/>
           </a:xfrm>
           <a:prstGeom prst="rect">
             <a:avLst/>
@@ -5149,7 +5149,7 @@
                   </a:schemeClr>
                 </a:solidFill>
               </a:rPr>
-              <a:t>A little more detail about the role</a:t>
+              <a:t>A little more background detail about the role</a:t>
             </a:r>
             <a:endParaRPr lang="en-IN" sz="2000" b="1" dirty="0">
               <a:solidFill>
@@ -5159,19 +5159,6 @@
                 </a:schemeClr>
               </a:solidFill>
             </a:endParaRPr>
-          </a:p>
-          <a:p>
-            <a:r>
-              <a:rPr lang="en-IN" sz="2000" b="1" dirty="0">
-                <a:solidFill>
-                  <a:schemeClr val="accent6">
-                    <a:lumMod val="60000"/>
-                    <a:lumOff val="40000"/>
-                  </a:schemeClr>
-                </a:solidFill>
-              </a:rPr>
-              <a:t>tools:</a:t>
-            </a:r>
           </a:p>
           <a:p>
             <a:r>
@@ -5196,9 +5183,58 @@
               </a:rPr>
               <a:t>: </a:t>
             </a:r>
+            <a:r>
+              <a:rPr lang="en-IN" sz="2000" dirty="0">
+                <a:solidFill>
+                  <a:schemeClr val="accent6">
+                    <a:lumMod val="60000"/>
+                    <a:lumOff val="40000"/>
+                  </a:schemeClr>
+                </a:solidFill>
+              </a:rPr>
+              <a:t>The Large Language Model that would be used by Agent</a:t>
+            </a:r>
+            <a:endParaRPr lang="en-IN" sz="2000" b="1" dirty="0">
+              <a:solidFill>
+                <a:schemeClr val="accent6">
+                  <a:lumMod val="60000"/>
+                  <a:lumOff val="40000"/>
+                </a:schemeClr>
+              </a:solidFill>
+            </a:endParaRPr>
           </a:p>
         </p:txBody>
       </p:sp>
+      <p:pic>
+        <p:nvPicPr>
+          <p:cNvPr id="3" name="Picture 2">
+            <a:extLst>
+              <a:ext uri="{FF2B5EF4-FFF2-40B4-BE49-F238E27FC236}">
+                <a16:creationId xmlns:a16="http://schemas.microsoft.com/office/drawing/2014/main" id="{28BE7B2D-1FAD-D1D8-51D4-3680396A83D6}"/>
+              </a:ext>
+            </a:extLst>
+          </p:cNvPr>
+          <p:cNvPicPr>
+            <a:picLocks noChangeAspect="1"/>
+          </p:cNvPicPr>
+          <p:nvPr/>
+        </p:nvPicPr>
+        <p:blipFill>
+          <a:blip r:embed="rId3"/>
+          <a:stretch>
+            <a:fillRect/>
+          </a:stretch>
+        </p:blipFill>
+        <p:spPr>
+          <a:xfrm>
+            <a:off x="353683" y="2872596"/>
+            <a:ext cx="11082327" cy="3708155"/>
+          </a:xfrm>
+          <a:prstGeom prst="rect">
+            <a:avLst/>
+          </a:prstGeom>
+        </p:spPr>
+      </p:pic>
     </p:spTree>
     <p:extLst>
       <p:ext uri="{BB962C8B-B14F-4D97-AF65-F5344CB8AC3E}">
